--- a/sorting_algorithms/Bubble Sort.pptx
+++ b/sorting_algorithms/Bubble Sort.pptx
@@ -5,7 +5,7 @@
     <p:sldMasterId id="2147483648" r:id="rId4"/>
   </p:sldMasterIdLst>
   <p:notesMasterIdLst>
-    <p:notesMasterId r:id="rId22"/>
+    <p:notesMasterId r:id="rId23"/>
   </p:notesMasterIdLst>
   <p:sldIdLst>
     <p:sldId id="272" r:id="rId5"/>
@@ -25,6 +25,7 @@
     <p:sldId id="288" r:id="rId19"/>
     <p:sldId id="289" r:id="rId20"/>
     <p:sldId id="290" r:id="rId21"/>
+    <p:sldId id="291" r:id="rId22"/>
   </p:sldIdLst>
   <p:sldSz cx="12192000" cy="6858000"/>
   <p:notesSz cx="6858000" cy="9144000"/>
@@ -221,7 +222,7 @@
           <a:p>
             <a:fld id="{F666E1FD-E7A0-497B-BBC0-740BAAC97C64}" type="datetimeFigureOut">
               <a:rPr lang="en-PH" smtClean="0"/>
-              <a:t>06/07/2026</a:t>
+              <a:t>14/07/2026</a:t>
             </a:fld>
             <a:endParaRPr lang="en-PH"/>
           </a:p>
@@ -1245,6 +1246,114 @@
 </p:notes>
 </file>
 
+<file path=ppt/notesSlides/notesSlide18.xml><?xml version="1.0" encoding="utf-8"?>
+<p:notes xmlns:a="http://schemas.openxmlformats.org/drawingml/2006/main" xmlns:r="http://schemas.openxmlformats.org/officeDocument/2006/relationships" xmlns:p="http://schemas.openxmlformats.org/presentationml/2006/main">
+  <p:cSld>
+    <p:spTree>
+      <p:nvGrpSpPr>
+        <p:cNvPr id="1" name="">
+          <a:extLst>
+            <a:ext uri="{FF2B5EF4-FFF2-40B4-BE49-F238E27FC236}">
+              <a16:creationId xmlns:a16="http://schemas.microsoft.com/office/drawing/2014/main" id="{49BD232D-1101-9698-D72F-BDE36A9BB84A}"/>
+            </a:ext>
+          </a:extLst>
+        </p:cNvPr>
+        <p:cNvGrpSpPr/>
+        <p:nvPr/>
+      </p:nvGrpSpPr>
+      <p:grpSpPr>
+        <a:xfrm>
+          <a:off x="0" y="0"/>
+          <a:ext cx="0" cy="0"/>
+          <a:chOff x="0" y="0"/>
+          <a:chExt cx="0" cy="0"/>
+        </a:xfrm>
+      </p:grpSpPr>
+      <p:sp>
+        <p:nvSpPr>
+          <p:cNvPr id="2" name="Slide Image Placeholder 1">
+            <a:extLst>
+              <a:ext uri="{FF2B5EF4-FFF2-40B4-BE49-F238E27FC236}">
+                <a16:creationId xmlns:a16="http://schemas.microsoft.com/office/drawing/2014/main" id="{69E2103E-9D24-1C56-2CCA-E8E991FBD0AE}"/>
+              </a:ext>
+            </a:extLst>
+          </p:cNvPr>
+          <p:cNvSpPr>
+            <a:spLocks noGrp="1" noRot="1" noChangeAspect="1"/>
+          </p:cNvSpPr>
+          <p:nvPr>
+            <p:ph type="sldImg"/>
+          </p:nvPr>
+        </p:nvSpPr>
+        <p:spPr/>
+      </p:sp>
+      <p:sp>
+        <p:nvSpPr>
+          <p:cNvPr id="3" name="Notes Placeholder 2">
+            <a:extLst>
+              <a:ext uri="{FF2B5EF4-FFF2-40B4-BE49-F238E27FC236}">
+                <a16:creationId xmlns:a16="http://schemas.microsoft.com/office/drawing/2014/main" id="{96F91505-CCB6-157E-5916-1A827EE345C5}"/>
+              </a:ext>
+            </a:extLst>
+          </p:cNvPr>
+          <p:cNvSpPr>
+            <a:spLocks noGrp="1"/>
+          </p:cNvSpPr>
+          <p:nvPr>
+            <p:ph type="body" idx="1"/>
+          </p:nvPr>
+        </p:nvSpPr>
+        <p:spPr/>
+        <p:txBody>
+          <a:bodyPr/>
+          <a:lstStyle/>
+          <a:p>
+            <a:endParaRPr lang="en-PH" dirty="0"/>
+          </a:p>
+        </p:txBody>
+      </p:sp>
+      <p:sp>
+        <p:nvSpPr>
+          <p:cNvPr id="4" name="Slide Number Placeholder 3">
+            <a:extLst>
+              <a:ext uri="{FF2B5EF4-FFF2-40B4-BE49-F238E27FC236}">
+                <a16:creationId xmlns:a16="http://schemas.microsoft.com/office/drawing/2014/main" id="{F9ACEDCE-3106-78F2-7DA8-695495605823}"/>
+              </a:ext>
+            </a:extLst>
+          </p:cNvPr>
+          <p:cNvSpPr>
+            <a:spLocks noGrp="1"/>
+          </p:cNvSpPr>
+          <p:nvPr>
+            <p:ph type="sldNum" sz="quarter" idx="5"/>
+          </p:nvPr>
+        </p:nvSpPr>
+        <p:spPr/>
+        <p:txBody>
+          <a:bodyPr/>
+          <a:lstStyle/>
+          <a:p>
+            <a:fld id="{FE90CCE9-4AAE-4E1F-85AD-521A406D6524}" type="slidenum">
+              <a:rPr lang="en-PH" smtClean="0"/>
+              <a:t>18</a:t>
+            </a:fld>
+            <a:endParaRPr lang="en-PH"/>
+          </a:p>
+        </p:txBody>
+      </p:sp>
+    </p:spTree>
+    <p:extLst>
+      <p:ext uri="{BB962C8B-B14F-4D97-AF65-F5344CB8AC3E}">
+        <p14:creationId xmlns:p14="http://schemas.microsoft.com/office/powerpoint/2010/main" val="2587695996"/>
+      </p:ext>
+    </p:extLst>
+  </p:cSld>
+  <p:clrMapOvr>
+    <a:masterClrMapping/>
+  </p:clrMapOvr>
+</p:notes>
+</file>
+
 <file path=ppt/notesSlides/notesSlide2.xml><?xml version="1.0" encoding="utf-8"?>
 <p:notes xmlns:a="http://schemas.openxmlformats.org/drawingml/2006/main" xmlns:r="http://schemas.openxmlformats.org/officeDocument/2006/relationships" xmlns:p="http://schemas.openxmlformats.org/presentationml/2006/main">
   <p:cSld>
@@ -2074,7 +2183,7 @@
           <a:p>
             <a:fld id="{0CCF0B81-6BD8-4C65-9459-815598C5F1F4}" type="datetimeFigureOut">
               <a:rPr lang="en-PH" smtClean="0"/>
-              <a:t>06/07/2026</a:t>
+              <a:t>14/07/2026</a:t>
             </a:fld>
             <a:endParaRPr lang="en-PH"/>
           </a:p>
@@ -2282,7 +2391,7 @@
           <a:p>
             <a:fld id="{0CCF0B81-6BD8-4C65-9459-815598C5F1F4}" type="datetimeFigureOut">
               <a:rPr lang="en-PH" smtClean="0"/>
-              <a:t>06/07/2026</a:t>
+              <a:t>14/07/2026</a:t>
             </a:fld>
             <a:endParaRPr lang="en-PH"/>
           </a:p>
@@ -2500,7 +2609,7 @@
           <a:p>
             <a:fld id="{0CCF0B81-6BD8-4C65-9459-815598C5F1F4}" type="datetimeFigureOut">
               <a:rPr lang="en-PH" smtClean="0"/>
-              <a:t>06/07/2026</a:t>
+              <a:t>14/07/2026</a:t>
             </a:fld>
             <a:endParaRPr lang="en-PH"/>
           </a:p>
@@ -2708,7 +2817,7 @@
           <a:p>
             <a:fld id="{0CCF0B81-6BD8-4C65-9459-815598C5F1F4}" type="datetimeFigureOut">
               <a:rPr lang="en-PH" smtClean="0"/>
-              <a:t>06/07/2026</a:t>
+              <a:t>14/07/2026</a:t>
             </a:fld>
             <a:endParaRPr lang="en-PH"/>
           </a:p>
@@ -2992,7 +3101,7 @@
           <a:p>
             <a:fld id="{0CCF0B81-6BD8-4C65-9459-815598C5F1F4}" type="datetimeFigureOut">
               <a:rPr lang="en-PH" smtClean="0"/>
-              <a:t>06/07/2026</a:t>
+              <a:t>14/07/2026</a:t>
             </a:fld>
             <a:endParaRPr lang="en-PH"/>
           </a:p>
@@ -3268,7 +3377,7 @@
           <a:p>
             <a:fld id="{0CCF0B81-6BD8-4C65-9459-815598C5F1F4}" type="datetimeFigureOut">
               <a:rPr lang="en-PH" smtClean="0"/>
-              <a:t>06/07/2026</a:t>
+              <a:t>14/07/2026</a:t>
             </a:fld>
             <a:endParaRPr lang="en-PH"/>
           </a:p>
@@ -3691,7 +3800,7 @@
           <a:p>
             <a:fld id="{0CCF0B81-6BD8-4C65-9459-815598C5F1F4}" type="datetimeFigureOut">
               <a:rPr lang="en-PH" smtClean="0"/>
-              <a:t>06/07/2026</a:t>
+              <a:t>14/07/2026</a:t>
             </a:fld>
             <a:endParaRPr lang="en-PH"/>
           </a:p>
@@ -3841,7 +3950,7 @@
           <a:p>
             <a:fld id="{0CCF0B81-6BD8-4C65-9459-815598C5F1F4}" type="datetimeFigureOut">
               <a:rPr lang="en-PH" smtClean="0"/>
-              <a:t>06/07/2026</a:t>
+              <a:t>14/07/2026</a:t>
             </a:fld>
             <a:endParaRPr lang="en-PH"/>
           </a:p>
@@ -3962,7 +4071,7 @@
           <a:p>
             <a:fld id="{0CCF0B81-6BD8-4C65-9459-815598C5F1F4}" type="datetimeFigureOut">
               <a:rPr lang="en-PH" smtClean="0"/>
-              <a:t>06/07/2026</a:t>
+              <a:t>14/07/2026</a:t>
             </a:fld>
             <a:endParaRPr lang="en-PH"/>
           </a:p>
@@ -4283,7 +4392,7 @@
           <a:p>
             <a:fld id="{0CCF0B81-6BD8-4C65-9459-815598C5F1F4}" type="datetimeFigureOut">
               <a:rPr lang="en-PH" smtClean="0"/>
-              <a:t>06/07/2026</a:t>
+              <a:t>14/07/2026</a:t>
             </a:fld>
             <a:endParaRPr lang="en-PH"/>
           </a:p>
@@ -4580,7 +4689,7 @@
           <a:p>
             <a:fld id="{0CCF0B81-6BD8-4C65-9459-815598C5F1F4}" type="datetimeFigureOut">
               <a:rPr lang="en-PH" smtClean="0"/>
-              <a:t>06/07/2026</a:t>
+              <a:t>14/07/2026</a:t>
             </a:fld>
             <a:endParaRPr lang="en-PH"/>
           </a:p>
@@ -4826,7 +4935,7 @@
           <a:p>
             <a:fld id="{0CCF0B81-6BD8-4C65-9459-815598C5F1F4}" type="datetimeFigureOut">
               <a:rPr lang="en-PH" smtClean="0"/>
-              <a:t>06/07/2026</a:t>
+              <a:t>14/07/2026</a:t>
             </a:fld>
             <a:endParaRPr lang="en-PH"/>
           </a:p>
@@ -5232,7 +5341,7 @@
     <p:bg>
       <p:bgPr>
         <a:solidFill>
-          <a:schemeClr val="bg1"/>
+          <a:schemeClr val="tx1"/>
         </a:solidFill>
         <a:effectLst/>
       </p:bgPr>
@@ -5280,10 +5389,18 @@
           <a:lstStyle/>
           <a:p>
             <a:r>
-              <a:rPr lang="en-US" b="1" dirty="0"/>
+              <a:rPr lang="en-US" b="1" dirty="0">
+                <a:solidFill>
+                  <a:srgbClr val="00B050"/>
+                </a:solidFill>
+              </a:rPr>
               <a:t>What is Sorting?</a:t>
             </a:r>
-            <a:endParaRPr lang="en-PH" b="1" dirty="0"/>
+            <a:endParaRPr lang="en-PH" b="1" dirty="0">
+              <a:solidFill>
+                <a:srgbClr val="00B050"/>
+              </a:solidFill>
+            </a:endParaRPr>
           </a:p>
         </p:txBody>
       </p:sp>
@@ -5409,6 +5526,9 @@
             <a:pPr algn="l"/>
             <a:r>
               <a:rPr lang="en-US" sz="3000" dirty="0">
+                <a:solidFill>
+                  <a:schemeClr val="bg1"/>
+                </a:solidFill>
                 <a:latin typeface="Calibri Body"/>
               </a:rPr>
               <a:t>A sorting algorithm is used to arrange elements of an array/list in a specific order.</a:t>
@@ -5417,48 +5537,72 @@
           <a:p>
             <a:pPr algn="l"/>
             <a:endParaRPr lang="en-US" sz="3000" dirty="0">
+              <a:solidFill>
+                <a:schemeClr val="bg1"/>
+              </a:solidFill>
               <a:latin typeface="Calibri Body"/>
             </a:endParaRPr>
           </a:p>
           <a:p>
             <a:pPr algn="l"/>
             <a:endParaRPr lang="en-US" sz="3000" dirty="0">
+              <a:solidFill>
+                <a:schemeClr val="bg1"/>
+              </a:solidFill>
               <a:latin typeface="Calibri Body"/>
             </a:endParaRPr>
           </a:p>
           <a:p>
             <a:pPr algn="l"/>
             <a:endParaRPr lang="en-US" sz="3000" dirty="0">
+              <a:solidFill>
+                <a:schemeClr val="bg1"/>
+              </a:solidFill>
               <a:latin typeface="Calibri Body"/>
             </a:endParaRPr>
           </a:p>
           <a:p>
             <a:pPr algn="l"/>
             <a:endParaRPr lang="en-US" sz="3000" dirty="0">
+              <a:solidFill>
+                <a:schemeClr val="bg1"/>
+              </a:solidFill>
               <a:latin typeface="Calibri Body"/>
             </a:endParaRPr>
           </a:p>
           <a:p>
             <a:pPr algn="l"/>
             <a:endParaRPr lang="en-US" sz="3000" dirty="0">
+              <a:solidFill>
+                <a:schemeClr val="bg1"/>
+              </a:solidFill>
               <a:latin typeface="Calibri Body"/>
             </a:endParaRPr>
           </a:p>
           <a:p>
             <a:pPr algn="l"/>
             <a:endParaRPr lang="en-US" sz="3000" dirty="0">
+              <a:solidFill>
+                <a:schemeClr val="bg1"/>
+              </a:solidFill>
               <a:latin typeface="Calibri Body"/>
             </a:endParaRPr>
           </a:p>
           <a:p>
             <a:pPr algn="l"/>
             <a:endParaRPr lang="en-US" sz="3000" dirty="0">
+              <a:solidFill>
+                <a:schemeClr val="bg1"/>
+              </a:solidFill>
               <a:latin typeface="Calibri Body"/>
             </a:endParaRPr>
           </a:p>
           <a:p>
             <a:pPr algn="l"/>
             <a:endParaRPr lang="en-US" sz="3000" dirty="0">
+              <a:solidFill>
+                <a:schemeClr val="bg1"/>
+              </a:solidFill>
               <a:latin typeface="Calibri Body"/>
             </a:endParaRPr>
           </a:p>
@@ -5483,7 +5627,7 @@
     <p:bg>
       <p:bgPr>
         <a:solidFill>
-          <a:schemeClr val="bg1"/>
+          <a:schemeClr val="tx1"/>
         </a:solidFill>
         <a:effectLst/>
       </p:bgPr>
@@ -5531,10 +5675,18 @@
           <a:lstStyle/>
           <a:p>
             <a:r>
-              <a:rPr lang="en-US" b="1" dirty="0"/>
+              <a:rPr lang="en-US" b="1" dirty="0">
+                <a:solidFill>
+                  <a:srgbClr val="00B050"/>
+                </a:solidFill>
+              </a:rPr>
               <a:t>Bubble Sort</a:t>
             </a:r>
-            <a:endParaRPr lang="en-PH" b="1" dirty="0"/>
+            <a:endParaRPr lang="en-PH" b="1" dirty="0">
+              <a:solidFill>
+                <a:srgbClr val="00B050"/>
+              </a:solidFill>
+            </a:endParaRPr>
           </a:p>
         </p:txBody>
       </p:sp>
@@ -6043,7 +6195,7 @@
     <p:bg>
       <p:bgPr>
         <a:solidFill>
-          <a:schemeClr val="bg1"/>
+          <a:schemeClr val="tx1"/>
         </a:solidFill>
         <a:effectLst/>
       </p:bgPr>
@@ -6091,10 +6243,18 @@
           <a:lstStyle/>
           <a:p>
             <a:r>
-              <a:rPr lang="en-US" b="1" dirty="0"/>
+              <a:rPr lang="en-US" b="1" dirty="0">
+                <a:solidFill>
+                  <a:srgbClr val="00B050"/>
+                </a:solidFill>
+              </a:rPr>
               <a:t>Bubble Sort</a:t>
             </a:r>
-            <a:endParaRPr lang="en-PH" b="1" dirty="0"/>
+            <a:endParaRPr lang="en-PH" b="1" dirty="0">
+              <a:solidFill>
+                <a:srgbClr val="00B050"/>
+              </a:solidFill>
+            </a:endParaRPr>
           </a:p>
         </p:txBody>
       </p:sp>
@@ -6357,7 +6517,7 @@
     <p:bg>
       <p:bgPr>
         <a:solidFill>
-          <a:schemeClr val="bg1"/>
+          <a:schemeClr val="tx1"/>
         </a:solidFill>
         <a:effectLst/>
       </p:bgPr>
@@ -6405,10 +6565,18 @@
           <a:lstStyle/>
           <a:p>
             <a:r>
-              <a:rPr lang="en-US" b="1" dirty="0"/>
+              <a:rPr lang="en-US" b="1" dirty="0">
+                <a:solidFill>
+                  <a:srgbClr val="00B050"/>
+                </a:solidFill>
+              </a:rPr>
               <a:t>Bubble Sort</a:t>
             </a:r>
-            <a:endParaRPr lang="en-PH" b="1" dirty="0"/>
+            <a:endParaRPr lang="en-PH" b="1" dirty="0">
+              <a:solidFill>
+                <a:srgbClr val="00B050"/>
+              </a:solidFill>
+            </a:endParaRPr>
           </a:p>
         </p:txBody>
       </p:sp>
@@ -6853,7 +7021,7 @@
     <p:bg>
       <p:bgPr>
         <a:solidFill>
-          <a:schemeClr val="bg1"/>
+          <a:schemeClr val="tx1"/>
         </a:solidFill>
         <a:effectLst/>
       </p:bgPr>
@@ -6901,10 +7069,18 @@
           <a:lstStyle/>
           <a:p>
             <a:r>
-              <a:rPr lang="en-US" b="1" dirty="0"/>
+              <a:rPr lang="en-US" b="1" dirty="0">
+                <a:solidFill>
+                  <a:srgbClr val="00B050"/>
+                </a:solidFill>
+              </a:rPr>
               <a:t>Bubble Sort</a:t>
             </a:r>
-            <a:endParaRPr lang="en-PH" b="1" dirty="0"/>
+            <a:endParaRPr lang="en-PH" b="1" dirty="0">
+              <a:solidFill>
+                <a:srgbClr val="00B050"/>
+              </a:solidFill>
+            </a:endParaRPr>
           </a:p>
         </p:txBody>
       </p:sp>
@@ -7349,7 +7525,7 @@
     <p:bg>
       <p:bgPr>
         <a:solidFill>
-          <a:schemeClr val="bg1"/>
+          <a:schemeClr val="tx1"/>
         </a:solidFill>
         <a:effectLst/>
       </p:bgPr>
@@ -7397,10 +7573,18 @@
           <a:lstStyle/>
           <a:p>
             <a:r>
-              <a:rPr lang="en-US" b="1" dirty="0"/>
+              <a:rPr lang="en-US" b="1" dirty="0">
+                <a:solidFill>
+                  <a:srgbClr val="00B050"/>
+                </a:solidFill>
+              </a:rPr>
               <a:t>Bubble Sort</a:t>
             </a:r>
-            <a:endParaRPr lang="en-PH" b="1" dirty="0"/>
+            <a:endParaRPr lang="en-PH" b="1" dirty="0">
+              <a:solidFill>
+                <a:srgbClr val="00B050"/>
+              </a:solidFill>
+            </a:endParaRPr>
           </a:p>
         </p:txBody>
       </p:sp>
@@ -7663,7 +7847,7 @@
     <p:bg>
       <p:bgPr>
         <a:solidFill>
-          <a:schemeClr val="bg1"/>
+          <a:schemeClr val="tx1"/>
         </a:solidFill>
         <a:effectLst/>
       </p:bgPr>
@@ -7711,10 +7895,18 @@
           <a:lstStyle/>
           <a:p>
             <a:r>
-              <a:rPr lang="en-US" b="1" dirty="0"/>
+              <a:rPr lang="en-US" b="1" dirty="0">
+                <a:solidFill>
+                  <a:srgbClr val="00B050"/>
+                </a:solidFill>
+              </a:rPr>
               <a:t>Bubble Sort</a:t>
             </a:r>
-            <a:endParaRPr lang="en-PH" b="1" dirty="0"/>
+            <a:endParaRPr lang="en-PH" b="1" dirty="0">
+              <a:solidFill>
+                <a:srgbClr val="00B050"/>
+              </a:solidFill>
+            </a:endParaRPr>
           </a:p>
         </p:txBody>
       </p:sp>
@@ -8159,7 +8351,7 @@
     <p:bg>
       <p:bgPr>
         <a:solidFill>
-          <a:schemeClr val="bg1"/>
+          <a:schemeClr val="tx1"/>
         </a:solidFill>
         <a:effectLst/>
       </p:bgPr>
@@ -8207,10 +8399,18 @@
           <a:lstStyle/>
           <a:p>
             <a:r>
-              <a:rPr lang="en-US" b="1" dirty="0"/>
+              <a:rPr lang="en-US" b="1" dirty="0">
+                <a:solidFill>
+                  <a:srgbClr val="00B050"/>
+                </a:solidFill>
+              </a:rPr>
               <a:t>Bubble Sort</a:t>
             </a:r>
-            <a:endParaRPr lang="en-PH" b="1" dirty="0"/>
+            <a:endParaRPr lang="en-PH" b="1" dirty="0">
+              <a:solidFill>
+                <a:srgbClr val="00B050"/>
+              </a:solidFill>
+            </a:endParaRPr>
           </a:p>
         </p:txBody>
       </p:sp>
@@ -8473,7 +8673,7 @@
     <p:bg>
       <p:bgPr>
         <a:solidFill>
-          <a:schemeClr val="bg1"/>
+          <a:schemeClr val="tx1"/>
         </a:solidFill>
         <a:effectLst/>
       </p:bgPr>
@@ -8521,10 +8721,18 @@
           <a:lstStyle/>
           <a:p>
             <a:r>
-              <a:rPr lang="en-US" b="1" dirty="0"/>
+              <a:rPr lang="en-US" b="1" dirty="0">
+                <a:solidFill>
+                  <a:srgbClr val="00B050"/>
+                </a:solidFill>
+              </a:rPr>
               <a:t>Bubble Sort</a:t>
             </a:r>
-            <a:endParaRPr lang="en-PH" b="1" dirty="0"/>
+            <a:endParaRPr lang="en-PH" b="1" dirty="0">
+              <a:solidFill>
+                <a:srgbClr val="00B050"/>
+              </a:solidFill>
+            </a:endParaRPr>
           </a:p>
         </p:txBody>
       </p:sp>
@@ -8961,13 +9169,1126 @@
 </p:sld>
 </file>
 
+<file path=ppt/slides/slide18.xml><?xml version="1.0" encoding="utf-8"?>
+<p:sld xmlns:a="http://schemas.openxmlformats.org/drawingml/2006/main" xmlns:r="http://schemas.openxmlformats.org/officeDocument/2006/relationships" xmlns:p="http://schemas.openxmlformats.org/presentationml/2006/main">
+  <p:cSld>
+    <p:bg>
+      <p:bgPr>
+        <a:solidFill>
+          <a:schemeClr val="tx1"/>
+        </a:solidFill>
+        <a:effectLst/>
+      </p:bgPr>
+    </p:bg>
+    <p:spTree>
+      <p:nvGrpSpPr>
+        <p:cNvPr id="1" name="">
+          <a:extLst>
+            <a:ext uri="{FF2B5EF4-FFF2-40B4-BE49-F238E27FC236}">
+              <a16:creationId xmlns:a16="http://schemas.microsoft.com/office/drawing/2014/main" id="{A5252635-43ED-878D-40B5-CBD888C75A4E}"/>
+            </a:ext>
+          </a:extLst>
+        </p:cNvPr>
+        <p:cNvGrpSpPr/>
+        <p:nvPr/>
+      </p:nvGrpSpPr>
+      <p:grpSpPr>
+        <a:xfrm>
+          <a:off x="0" y="0"/>
+          <a:ext cx="0" cy="0"/>
+          <a:chOff x="0" y="0"/>
+          <a:chExt cx="0" cy="0"/>
+        </a:xfrm>
+      </p:grpSpPr>
+      <p:cxnSp>
+        <p:nvCxnSpPr>
+          <p:cNvPr id="24" name="Straight Arrow Connector 23">
+            <a:extLst>
+              <a:ext uri="{FF2B5EF4-FFF2-40B4-BE49-F238E27FC236}">
+                <a16:creationId xmlns:a16="http://schemas.microsoft.com/office/drawing/2014/main" id="{1C39FF66-1BB8-4635-9C86-ED40C713ED61}"/>
+              </a:ext>
+            </a:extLst>
+          </p:cNvPr>
+          <p:cNvCxnSpPr/>
+          <p:nvPr/>
+        </p:nvCxnSpPr>
+        <p:spPr>
+          <a:xfrm>
+            <a:off x="1968500" y="5486400"/>
+            <a:ext cx="8020050" cy="0"/>
+          </a:xfrm>
+          <a:prstGeom prst="straightConnector1">
+            <a:avLst/>
+          </a:prstGeom>
+          <a:ln w="76200">
+            <a:solidFill>
+              <a:schemeClr val="tx1">
+                <a:lumMod val="50000"/>
+                <a:lumOff val="50000"/>
+              </a:schemeClr>
+            </a:solidFill>
+            <a:tailEnd type="triangle"/>
+          </a:ln>
+        </p:spPr>
+        <p:style>
+          <a:lnRef idx="1">
+            <a:schemeClr val="accent1"/>
+          </a:lnRef>
+          <a:fillRef idx="0">
+            <a:schemeClr val="accent1"/>
+          </a:fillRef>
+          <a:effectRef idx="0">
+            <a:schemeClr val="accent1"/>
+          </a:effectRef>
+          <a:fontRef idx="minor">
+            <a:schemeClr val="tx1"/>
+          </a:fontRef>
+        </p:style>
+      </p:cxnSp>
+      <p:cxnSp>
+        <p:nvCxnSpPr>
+          <p:cNvPr id="25" name="Straight Arrow Connector 24">
+            <a:extLst>
+              <a:ext uri="{FF2B5EF4-FFF2-40B4-BE49-F238E27FC236}">
+                <a16:creationId xmlns:a16="http://schemas.microsoft.com/office/drawing/2014/main" id="{EF483D74-9B32-7289-31FA-F05A72BB9D69}"/>
+              </a:ext>
+            </a:extLst>
+          </p:cNvPr>
+          <p:cNvCxnSpPr>
+            <a:cxnSpLocks/>
+          </p:cNvCxnSpPr>
+          <p:nvPr/>
+        </p:nvCxnSpPr>
+        <p:spPr>
+          <a:xfrm flipV="1">
+            <a:off x="1968500" y="327025"/>
+            <a:ext cx="0" cy="5197475"/>
+          </a:xfrm>
+          <a:prstGeom prst="straightConnector1">
+            <a:avLst/>
+          </a:prstGeom>
+          <a:ln w="76200">
+            <a:solidFill>
+              <a:schemeClr val="tx1">
+                <a:lumMod val="50000"/>
+                <a:lumOff val="50000"/>
+              </a:schemeClr>
+            </a:solidFill>
+            <a:tailEnd type="triangle"/>
+          </a:ln>
+        </p:spPr>
+        <p:style>
+          <a:lnRef idx="1">
+            <a:schemeClr val="accent1"/>
+          </a:lnRef>
+          <a:fillRef idx="0">
+            <a:schemeClr val="accent1"/>
+          </a:fillRef>
+          <a:effectRef idx="0">
+            <a:schemeClr val="accent1"/>
+          </a:effectRef>
+          <a:fontRef idx="minor">
+            <a:schemeClr val="tx1"/>
+          </a:fontRef>
+        </p:style>
+      </p:cxnSp>
+      <p:sp>
+        <p:nvSpPr>
+          <p:cNvPr id="26" name="TextBox 25">
+            <a:extLst>
+              <a:ext uri="{FF2B5EF4-FFF2-40B4-BE49-F238E27FC236}">
+                <a16:creationId xmlns:a16="http://schemas.microsoft.com/office/drawing/2014/main" id="{B5CA9A6E-CFF0-89F9-7DA8-927DC5C0ADE9}"/>
+              </a:ext>
+            </a:extLst>
+          </p:cNvPr>
+          <p:cNvSpPr txBox="1"/>
+          <p:nvPr/>
+        </p:nvSpPr>
+        <p:spPr>
+          <a:xfrm>
+            <a:off x="5321935" y="5652964"/>
+            <a:ext cx="1313180" cy="707886"/>
+          </a:xfrm>
+          <a:prstGeom prst="rect">
+            <a:avLst/>
+          </a:prstGeom>
+          <a:noFill/>
+          <a:ln>
+            <a:solidFill>
+              <a:schemeClr val="bg1"/>
+            </a:solidFill>
+          </a:ln>
+        </p:spPr>
+        <p:txBody>
+          <a:bodyPr wrap="none" rtlCol="0">
+            <a:spAutoFit/>
+          </a:bodyPr>
+          <a:lstStyle/>
+          <a:p>
+            <a:r>
+              <a:rPr lang="en-PH" sz="4000" b="1" dirty="0">
+                <a:solidFill>
+                  <a:schemeClr val="bg1"/>
+                </a:solidFill>
+                <a:latin typeface="Consolas" panose="020B0609020204030204" pitchFamily="49" charset="0"/>
+              </a:rPr>
+              <a:t>data</a:t>
+            </a:r>
+          </a:p>
+        </p:txBody>
+      </p:sp>
+      <p:sp>
+        <p:nvSpPr>
+          <p:cNvPr id="27" name="TextBox 26">
+            <a:extLst>
+              <a:ext uri="{FF2B5EF4-FFF2-40B4-BE49-F238E27FC236}">
+                <a16:creationId xmlns:a16="http://schemas.microsoft.com/office/drawing/2014/main" id="{FB35F085-813B-260E-F1BA-94DC3E5119EA}"/>
+              </a:ext>
+            </a:extLst>
+          </p:cNvPr>
+          <p:cNvSpPr txBox="1"/>
+          <p:nvPr/>
+        </p:nvSpPr>
+        <p:spPr>
+          <a:xfrm rot="5400000" flipH="1">
+            <a:off x="513467" y="2571819"/>
+            <a:ext cx="1313180" cy="707886"/>
+          </a:xfrm>
+          <a:prstGeom prst="rect">
+            <a:avLst/>
+          </a:prstGeom>
+          <a:noFill/>
+          <a:ln>
+            <a:solidFill>
+              <a:schemeClr val="bg1"/>
+            </a:solidFill>
+          </a:ln>
+        </p:spPr>
+        <p:txBody>
+          <a:bodyPr wrap="none" rtlCol="0">
+            <a:spAutoFit/>
+          </a:bodyPr>
+          <a:lstStyle/>
+          <a:p>
+            <a:r>
+              <a:rPr lang="en-PH" sz="4000" b="1" dirty="0">
+                <a:solidFill>
+                  <a:schemeClr val="bg1"/>
+                </a:solidFill>
+                <a:latin typeface="Consolas" panose="020B0609020204030204" pitchFamily="49" charset="0"/>
+              </a:rPr>
+              <a:t>time</a:t>
+            </a:r>
+          </a:p>
+        </p:txBody>
+      </p:sp>
+      <p:cxnSp>
+        <p:nvCxnSpPr>
+          <p:cNvPr id="28" name="Straight Arrow Connector 27">
+            <a:extLst>
+              <a:ext uri="{FF2B5EF4-FFF2-40B4-BE49-F238E27FC236}">
+                <a16:creationId xmlns:a16="http://schemas.microsoft.com/office/drawing/2014/main" id="{84877FBD-84EF-ECC2-885F-3BCA474E9FE7}"/>
+              </a:ext>
+            </a:extLst>
+          </p:cNvPr>
+          <p:cNvCxnSpPr>
+            <a:cxnSpLocks/>
+          </p:cNvCxnSpPr>
+          <p:nvPr/>
+        </p:nvCxnSpPr>
+        <p:spPr>
+          <a:xfrm flipV="1">
+            <a:off x="1968500" y="2125981"/>
+            <a:ext cx="5925820" cy="3322320"/>
+          </a:xfrm>
+          <a:prstGeom prst="straightConnector1">
+            <a:avLst/>
+          </a:prstGeom>
+          <a:ln w="76200">
+            <a:solidFill>
+              <a:srgbClr val="FFFF00"/>
+            </a:solidFill>
+            <a:tailEnd type="none"/>
+          </a:ln>
+        </p:spPr>
+        <p:style>
+          <a:lnRef idx="1">
+            <a:schemeClr val="accent1"/>
+          </a:lnRef>
+          <a:fillRef idx="0">
+            <a:schemeClr val="accent1"/>
+          </a:fillRef>
+          <a:effectRef idx="0">
+            <a:schemeClr val="accent1"/>
+          </a:effectRef>
+          <a:fontRef idx="minor">
+            <a:schemeClr val="tx1"/>
+          </a:fontRef>
+        </p:style>
+      </p:cxnSp>
+      <p:sp>
+        <p:nvSpPr>
+          <p:cNvPr id="29" name="Arc 28">
+            <a:extLst>
+              <a:ext uri="{FF2B5EF4-FFF2-40B4-BE49-F238E27FC236}">
+                <a16:creationId xmlns:a16="http://schemas.microsoft.com/office/drawing/2014/main" id="{BF50E54C-78B9-4729-ED55-7CA6D0F7112F}"/>
+              </a:ext>
+            </a:extLst>
+          </p:cNvPr>
+          <p:cNvSpPr/>
+          <p:nvPr/>
+        </p:nvSpPr>
+        <p:spPr>
+          <a:xfrm rot="16200000">
+            <a:off x="7532684" y="-1535115"/>
+            <a:ext cx="2933704" cy="13852525"/>
+          </a:xfrm>
+          <a:prstGeom prst="arc">
+            <a:avLst>
+              <a:gd name="adj1" fmla="val 16200000"/>
+              <a:gd name="adj2" fmla="val 228024"/>
+            </a:avLst>
+          </a:prstGeom>
+          <a:ln w="76200">
+            <a:solidFill>
+              <a:srgbClr val="92D050"/>
+            </a:solidFill>
+          </a:ln>
+        </p:spPr>
+        <p:style>
+          <a:lnRef idx="1">
+            <a:schemeClr val="accent1"/>
+          </a:lnRef>
+          <a:fillRef idx="0">
+            <a:schemeClr val="accent1"/>
+          </a:fillRef>
+          <a:effectRef idx="0">
+            <a:schemeClr val="accent1"/>
+          </a:effectRef>
+          <a:fontRef idx="minor">
+            <a:schemeClr val="tx1"/>
+          </a:fontRef>
+        </p:style>
+        <p:txBody>
+          <a:bodyPr rtlCol="0" anchor="ctr"/>
+          <a:lstStyle/>
+          <a:p>
+            <a:pPr algn="ctr"/>
+            <a:endParaRPr lang="en-PH"/>
+          </a:p>
+        </p:txBody>
+      </p:sp>
+      <p:sp>
+        <p:nvSpPr>
+          <p:cNvPr id="30" name="TextBox 29">
+            <a:extLst>
+              <a:ext uri="{FF2B5EF4-FFF2-40B4-BE49-F238E27FC236}">
+                <a16:creationId xmlns:a16="http://schemas.microsoft.com/office/drawing/2014/main" id="{2F9DE403-A124-9EFF-F2FC-79A8B5ADE280}"/>
+              </a:ext>
+            </a:extLst>
+          </p:cNvPr>
+          <p:cNvSpPr txBox="1"/>
+          <p:nvPr/>
+        </p:nvSpPr>
+        <p:spPr>
+          <a:xfrm>
+            <a:off x="8179435" y="1667966"/>
+            <a:ext cx="1313180" cy="707886"/>
+          </a:xfrm>
+          <a:prstGeom prst="rect">
+            <a:avLst/>
+          </a:prstGeom>
+          <a:noFill/>
+        </p:spPr>
+        <p:txBody>
+          <a:bodyPr wrap="none" rtlCol="0">
+            <a:spAutoFit/>
+          </a:bodyPr>
+          <a:lstStyle/>
+          <a:p>
+            <a:r>
+              <a:rPr lang="en-PH" sz="4000" b="1" dirty="0">
+                <a:solidFill>
+                  <a:srgbClr val="FFFF00"/>
+                </a:solidFill>
+                <a:latin typeface="Consolas" panose="020B0609020204030204" pitchFamily="49" charset="0"/>
+              </a:rPr>
+              <a:t>O(n)</a:t>
+            </a:r>
+          </a:p>
+        </p:txBody>
+      </p:sp>
+      <p:sp>
+        <p:nvSpPr>
+          <p:cNvPr id="31" name="TextBox 30">
+            <a:extLst>
+              <a:ext uri="{FF2B5EF4-FFF2-40B4-BE49-F238E27FC236}">
+                <a16:creationId xmlns:a16="http://schemas.microsoft.com/office/drawing/2014/main" id="{BD7DE312-A2D7-39AB-F914-98B10D9C689D}"/>
+              </a:ext>
+            </a:extLst>
+          </p:cNvPr>
+          <p:cNvSpPr txBox="1"/>
+          <p:nvPr/>
+        </p:nvSpPr>
+        <p:spPr>
+          <a:xfrm>
+            <a:off x="9447153" y="3489146"/>
+            <a:ext cx="2441694" cy="707886"/>
+          </a:xfrm>
+          <a:prstGeom prst="rect">
+            <a:avLst/>
+          </a:prstGeom>
+          <a:noFill/>
+        </p:spPr>
+        <p:txBody>
+          <a:bodyPr wrap="none" rtlCol="0">
+            <a:spAutoFit/>
+          </a:bodyPr>
+          <a:lstStyle/>
+          <a:p>
+            <a:r>
+              <a:rPr lang="en-PH" sz="4000" b="1" dirty="0">
+                <a:solidFill>
+                  <a:srgbClr val="92D050"/>
+                </a:solidFill>
+                <a:latin typeface="Consolas" panose="020B0609020204030204" pitchFamily="49" charset="0"/>
+              </a:rPr>
+              <a:t>O(log n)</a:t>
+            </a:r>
+          </a:p>
+        </p:txBody>
+      </p:sp>
+      <p:sp>
+        <p:nvSpPr>
+          <p:cNvPr id="32" name="Freeform: Shape 31">
+            <a:extLst>
+              <a:ext uri="{FF2B5EF4-FFF2-40B4-BE49-F238E27FC236}">
+                <a16:creationId xmlns:a16="http://schemas.microsoft.com/office/drawing/2014/main" id="{D2106F4C-9155-389C-E373-205B6E3569DD}"/>
+              </a:ext>
+            </a:extLst>
+          </p:cNvPr>
+          <p:cNvSpPr/>
+          <p:nvPr/>
+        </p:nvSpPr>
+        <p:spPr>
+          <a:xfrm>
+            <a:off x="2134419" y="721801"/>
+            <a:ext cx="4856961" cy="4675239"/>
+          </a:xfrm>
+          <a:custGeom>
+            <a:avLst/>
+            <a:gdLst>
+              <a:gd name="csX0" fmla="*/ 0 w 4856961"/>
+              <a:gd name="csY0" fmla="*/ 4675239 h 4675239"/>
+              <a:gd name="csX1" fmla="*/ 4100052 w 4856961"/>
+              <a:gd name="csY1" fmla="*/ 1932039 h 4675239"/>
+              <a:gd name="csX2" fmla="*/ 4844846 w 4856961"/>
+              <a:gd name="csY2" fmla="*/ 0 h 4675239"/>
+            </a:gdLst>
+            <a:ahLst/>
+            <a:cxnLst>
+              <a:cxn ang="0">
+                <a:pos x="csX0" y="csY0"/>
+              </a:cxn>
+              <a:cxn ang="0">
+                <a:pos x="csX1" y="csY1"/>
+              </a:cxn>
+              <a:cxn ang="0">
+                <a:pos x="csX2" y="csY2"/>
+              </a:cxn>
+            </a:cxnLst>
+            <a:rect l="l" t="t" r="r" b="b"/>
+            <a:pathLst>
+              <a:path w="4856961" h="4675239">
+                <a:moveTo>
+                  <a:pt x="0" y="4675239"/>
+                </a:moveTo>
+                <a:cubicBezTo>
+                  <a:pt x="1646289" y="3693242"/>
+                  <a:pt x="3292578" y="2711245"/>
+                  <a:pt x="4100052" y="1932039"/>
+                </a:cubicBezTo>
+                <a:cubicBezTo>
+                  <a:pt x="4907526" y="1152833"/>
+                  <a:pt x="4876186" y="576416"/>
+                  <a:pt x="4844846" y="0"/>
+                </a:cubicBezTo>
+              </a:path>
+            </a:pathLst>
+          </a:custGeom>
+          <a:noFill/>
+          <a:ln w="76200">
+            <a:solidFill>
+              <a:srgbClr val="FFC000"/>
+            </a:solidFill>
+          </a:ln>
+        </p:spPr>
+        <p:style>
+          <a:lnRef idx="2">
+            <a:schemeClr val="accent1">
+              <a:shade val="15000"/>
+            </a:schemeClr>
+          </a:lnRef>
+          <a:fillRef idx="1">
+            <a:schemeClr val="accent1"/>
+          </a:fillRef>
+          <a:effectRef idx="0">
+            <a:schemeClr val="accent1"/>
+          </a:effectRef>
+          <a:fontRef idx="minor">
+            <a:schemeClr val="lt1"/>
+          </a:fontRef>
+        </p:style>
+        <p:txBody>
+          <a:bodyPr rtlCol="0" anchor="ctr"/>
+          <a:lstStyle/>
+          <a:p>
+            <a:pPr algn="ctr"/>
+            <a:endParaRPr lang="en-PH"/>
+          </a:p>
+        </p:txBody>
+      </p:sp>
+      <p:sp>
+        <p:nvSpPr>
+          <p:cNvPr id="33" name="TextBox 32">
+            <a:extLst>
+              <a:ext uri="{FF2B5EF4-FFF2-40B4-BE49-F238E27FC236}">
+                <a16:creationId xmlns:a16="http://schemas.microsoft.com/office/drawing/2014/main" id="{936229C3-E76A-C7D5-8CE5-44426758EF49}"/>
+              </a:ext>
+            </a:extLst>
+          </p:cNvPr>
+          <p:cNvSpPr txBox="1"/>
+          <p:nvPr/>
+        </p:nvSpPr>
+        <p:spPr>
+          <a:xfrm>
+            <a:off x="7106498" y="148493"/>
+            <a:ext cx="3005951" cy="707886"/>
+          </a:xfrm>
+          <a:prstGeom prst="rect">
+            <a:avLst/>
+          </a:prstGeom>
+          <a:noFill/>
+        </p:spPr>
+        <p:txBody>
+          <a:bodyPr wrap="none" rtlCol="0">
+            <a:spAutoFit/>
+          </a:bodyPr>
+          <a:lstStyle/>
+          <a:p>
+            <a:r>
+              <a:rPr lang="en-PH" sz="4000" b="1" dirty="0">
+                <a:solidFill>
+                  <a:srgbClr val="FFC000"/>
+                </a:solidFill>
+                <a:latin typeface="Consolas" panose="020B0609020204030204" pitchFamily="49" charset="0"/>
+              </a:rPr>
+              <a:t>O(n log n)</a:t>
+            </a:r>
+          </a:p>
+        </p:txBody>
+      </p:sp>
+      <p:sp>
+        <p:nvSpPr>
+          <p:cNvPr id="34" name="Freeform: Shape 33">
+            <a:extLst>
+              <a:ext uri="{FF2B5EF4-FFF2-40B4-BE49-F238E27FC236}">
+                <a16:creationId xmlns:a16="http://schemas.microsoft.com/office/drawing/2014/main" id="{37CDCBEF-4732-FE5F-7694-9CAB233A5018}"/>
+              </a:ext>
+            </a:extLst>
+          </p:cNvPr>
+          <p:cNvSpPr/>
+          <p:nvPr/>
+        </p:nvSpPr>
+        <p:spPr>
+          <a:xfrm>
+            <a:off x="2007843" y="549919"/>
+            <a:ext cx="2034578" cy="4942875"/>
+          </a:xfrm>
+          <a:custGeom>
+            <a:avLst/>
+            <a:gdLst>
+              <a:gd name="csX0" fmla="*/ 0 w 2034578"/>
+              <a:gd name="csY0" fmla="*/ 4942875 h 4942875"/>
+              <a:gd name="csX1" fmla="*/ 1796828 w 2034578"/>
+              <a:gd name="csY1" fmla="*/ 2276408 h 4942875"/>
+              <a:gd name="csX2" fmla="*/ 1963083 w 2034578"/>
+              <a:gd name="csY2" fmla="*/ 0 h 4942875"/>
+            </a:gdLst>
+            <a:ahLst/>
+            <a:cxnLst>
+              <a:cxn ang="0">
+                <a:pos x="csX0" y="csY0"/>
+              </a:cxn>
+              <a:cxn ang="0">
+                <a:pos x="csX1" y="csY1"/>
+              </a:cxn>
+              <a:cxn ang="0">
+                <a:pos x="csX2" y="csY2"/>
+              </a:cxn>
+            </a:cxnLst>
+            <a:rect l="l" t="t" r="r" b="b"/>
+            <a:pathLst>
+              <a:path w="2034578" h="4942875">
+                <a:moveTo>
+                  <a:pt x="0" y="4942875"/>
+                </a:moveTo>
+                <a:cubicBezTo>
+                  <a:pt x="734824" y="4021547"/>
+                  <a:pt x="1469648" y="3100220"/>
+                  <a:pt x="1796828" y="2276408"/>
+                </a:cubicBezTo>
+                <a:cubicBezTo>
+                  <a:pt x="2124008" y="1452596"/>
+                  <a:pt x="2043545" y="726298"/>
+                  <a:pt x="1963083" y="0"/>
+                </a:cubicBezTo>
+              </a:path>
+            </a:pathLst>
+          </a:custGeom>
+          <a:noFill/>
+          <a:ln w="76200">
+            <a:solidFill>
+              <a:srgbClr val="FF6600"/>
+            </a:solidFill>
+          </a:ln>
+        </p:spPr>
+        <p:style>
+          <a:lnRef idx="2">
+            <a:schemeClr val="accent1">
+              <a:shade val="15000"/>
+            </a:schemeClr>
+          </a:lnRef>
+          <a:fillRef idx="1">
+            <a:schemeClr val="accent1"/>
+          </a:fillRef>
+          <a:effectRef idx="0">
+            <a:schemeClr val="accent1"/>
+          </a:effectRef>
+          <a:fontRef idx="minor">
+            <a:schemeClr val="lt1"/>
+          </a:fontRef>
+        </p:style>
+        <p:txBody>
+          <a:bodyPr rtlCol="0" anchor="ctr"/>
+          <a:lstStyle/>
+          <a:p>
+            <a:pPr algn="ctr"/>
+            <a:endParaRPr lang="en-PH"/>
+          </a:p>
+        </p:txBody>
+      </p:sp>
+      <mc:AlternateContent xmlns:mc="http://schemas.openxmlformats.org/markup-compatibility/2006" xmlns:a14="http://schemas.microsoft.com/office/drawing/2010/main">
+        <mc:Choice Requires="a14">
+          <p:sp>
+            <p:nvSpPr>
+              <p:cNvPr id="35" name="TextBox 34">
+                <a:extLst>
+                  <a:ext uri="{FF2B5EF4-FFF2-40B4-BE49-F238E27FC236}">
+                    <a16:creationId xmlns:a16="http://schemas.microsoft.com/office/drawing/2014/main" id="{14F98889-FAAC-9CD2-E7EA-CA3553C58D44}"/>
+                  </a:ext>
+                </a:extLst>
+              </p:cNvPr>
+              <p:cNvSpPr txBox="1"/>
+              <p:nvPr/>
+            </p:nvSpPr>
+            <p:spPr>
+              <a:xfrm>
+                <a:off x="4042421" y="0"/>
+                <a:ext cx="1608582" cy="721801"/>
+              </a:xfrm>
+              <a:prstGeom prst="rect">
+                <a:avLst/>
+              </a:prstGeom>
+              <a:noFill/>
+            </p:spPr>
+            <p:txBody>
+              <a:bodyPr wrap="none" rtlCol="0">
+                <a:spAutoFit/>
+              </a:bodyPr>
+              <a:lstStyle/>
+              <a:p>
+                <a:r>
+                  <a:rPr lang="en-PH" sz="4000" b="1" dirty="0">
+                    <a:solidFill>
+                      <a:srgbClr val="FF6600"/>
+                    </a:solidFill>
+                    <a:latin typeface="Consolas" panose="020B0609020204030204" pitchFamily="49" charset="0"/>
+                  </a:rPr>
+                  <a:t>O(</a:t>
+                </a:r>
+                <a14:m>
+                  <m:oMath xmlns:m="http://schemas.openxmlformats.org/officeDocument/2006/math">
+                    <m:sSup>
+                      <m:sSupPr>
+                        <m:ctrlPr>
+                          <a:rPr lang="en-PH" sz="4000" b="1" i="1" smtClean="0">
+                            <a:solidFill>
+                              <a:srgbClr val="FF6600"/>
+                            </a:solidFill>
+                            <a:latin typeface="Cambria Math" panose="02040503050406030204" pitchFamily="18" charset="0"/>
+                          </a:rPr>
+                        </m:ctrlPr>
+                      </m:sSupPr>
+                      <m:e>
+                        <m:r>
+                          <a:rPr lang="en-PH" sz="4000" b="1" i="1" smtClean="0">
+                            <a:solidFill>
+                              <a:srgbClr val="FF6600"/>
+                            </a:solidFill>
+                            <a:latin typeface="Cambria Math" panose="02040503050406030204" pitchFamily="18" charset="0"/>
+                          </a:rPr>
+                          <m:t>𝒏</m:t>
+                        </m:r>
+                      </m:e>
+                      <m:sup>
+                        <m:r>
+                          <a:rPr lang="en-PH" sz="4000" b="1" i="1" smtClean="0">
+                            <a:solidFill>
+                              <a:srgbClr val="FF6600"/>
+                            </a:solidFill>
+                            <a:latin typeface="Cambria Math" panose="02040503050406030204" pitchFamily="18" charset="0"/>
+                          </a:rPr>
+                          <m:t>𝟐</m:t>
+                        </m:r>
+                      </m:sup>
+                    </m:sSup>
+                  </m:oMath>
+                </a14:m>
+                <a:r>
+                  <a:rPr lang="en-PH" sz="4000" b="1" dirty="0">
+                    <a:solidFill>
+                      <a:srgbClr val="FF6600"/>
+                    </a:solidFill>
+                    <a:latin typeface="Consolas" panose="020B0609020204030204" pitchFamily="49" charset="0"/>
+                  </a:rPr>
+                  <a:t>)</a:t>
+                </a:r>
+              </a:p>
+            </p:txBody>
+          </p:sp>
+        </mc:Choice>
+        <mc:Fallback xmlns="">
+          <p:sp>
+            <p:nvSpPr>
+              <p:cNvPr id="35" name="TextBox 34">
+                <a:extLst>
+                  <a:ext uri="{FF2B5EF4-FFF2-40B4-BE49-F238E27FC236}">
+                    <a16:creationId xmlns:a16="http://schemas.microsoft.com/office/drawing/2014/main" id="{14F98889-FAAC-9CD2-E7EA-CA3553C58D44}"/>
+                  </a:ext>
+                </a:extLst>
+              </p:cNvPr>
+              <p:cNvSpPr txBox="1">
+                <a:spLocks noRot="1" noChangeAspect="1" noMove="1" noResize="1" noEditPoints="1" noAdjustHandles="1" noChangeArrowheads="1" noChangeShapeType="1" noTextEdit="1"/>
+              </p:cNvSpPr>
+              <p:nvPr/>
+            </p:nvSpPr>
+            <p:spPr>
+              <a:xfrm>
+                <a:off x="4042421" y="0"/>
+                <a:ext cx="1608582" cy="721801"/>
+              </a:xfrm>
+              <a:prstGeom prst="rect">
+                <a:avLst/>
+              </a:prstGeom>
+              <a:blipFill>
+                <a:blip r:embed="rId3"/>
+                <a:stretch>
+                  <a:fillRect l="-13258" t="-12712" r="-12500" b="-36441"/>
+                </a:stretch>
+              </a:blipFill>
+            </p:spPr>
+            <p:txBody>
+              <a:bodyPr/>
+              <a:lstStyle/>
+              <a:p>
+                <a:r>
+                  <a:rPr lang="en-PH">
+                    <a:noFill/>
+                  </a:rPr>
+                  <a:t> </a:t>
+                </a:r>
+              </a:p>
+            </p:txBody>
+          </p:sp>
+        </mc:Fallback>
+      </mc:AlternateContent>
+      <mc:AlternateContent xmlns:mc="http://schemas.openxmlformats.org/markup-compatibility/2006" xmlns:a14="http://schemas.microsoft.com/office/drawing/2010/main">
+        <mc:Choice Requires="a14">
+          <p:sp>
+            <p:nvSpPr>
+              <p:cNvPr id="36" name="TextBox 35">
+                <a:extLst>
+                  <a:ext uri="{FF2B5EF4-FFF2-40B4-BE49-F238E27FC236}">
+                    <a16:creationId xmlns:a16="http://schemas.microsoft.com/office/drawing/2014/main" id="{DF7BB878-4EFC-B462-EDDB-EAD09A21C43D}"/>
+                  </a:ext>
+                </a:extLst>
+              </p:cNvPr>
+              <p:cNvSpPr txBox="1"/>
+              <p:nvPr/>
+            </p:nvSpPr>
+            <p:spPr>
+              <a:xfrm>
+                <a:off x="4077495" y="627358"/>
+                <a:ext cx="2426177" cy="1036630"/>
+              </a:xfrm>
+              <a:prstGeom prst="rect">
+                <a:avLst/>
+              </a:prstGeom>
+              <a:noFill/>
+            </p:spPr>
+            <p:txBody>
+              <a:bodyPr wrap="none" rtlCol="0">
+                <a:spAutoFit/>
+              </a:bodyPr>
+              <a:lstStyle/>
+              <a:p>
+                <a:r>
+                  <a:rPr lang="en-PH" sz="1500" b="1" dirty="0">
+                    <a:solidFill>
+                      <a:srgbClr val="FF6600"/>
+                    </a:solidFill>
+                    <a:latin typeface="Consolas" panose="020B0609020204030204" pitchFamily="49" charset="0"/>
+                  </a:rPr>
+                  <a:t>O(</a:t>
+                </a:r>
+                <a14:m>
+                  <m:oMath xmlns:m="http://schemas.openxmlformats.org/officeDocument/2006/math">
+                    <m:sSup>
+                      <m:sSupPr>
+                        <m:ctrlPr>
+                          <a:rPr lang="en-PH" sz="1500" b="1" i="1">
+                            <a:solidFill>
+                              <a:srgbClr val="FF6600"/>
+                            </a:solidFill>
+                            <a:latin typeface="Cambria Math" panose="02040503050406030204" pitchFamily="18" charset="0"/>
+                          </a:rPr>
+                        </m:ctrlPr>
+                      </m:sSupPr>
+                      <m:e>
+                        <m:r>
+                          <a:rPr lang="en-PH" sz="1500" b="1" i="1">
+                            <a:solidFill>
+                              <a:srgbClr val="FF6600"/>
+                            </a:solidFill>
+                            <a:latin typeface="Cambria Math" panose="02040503050406030204" pitchFamily="18" charset="0"/>
+                          </a:rPr>
+                          <m:t>𝒏</m:t>
+                        </m:r>
+                      </m:e>
+                      <m:sup>
+                        <m:r>
+                          <a:rPr lang="en-PH" sz="1500" b="1" i="1">
+                            <a:solidFill>
+                              <a:srgbClr val="FF6600"/>
+                            </a:solidFill>
+                            <a:latin typeface="Cambria Math" panose="02040503050406030204" pitchFamily="18" charset="0"/>
+                          </a:rPr>
+                          <m:t>𝟐</m:t>
+                        </m:r>
+                      </m:sup>
+                    </m:sSup>
+                  </m:oMath>
+                </a14:m>
+                <a:r>
+                  <a:rPr lang="en-PH" sz="1500" b="1" dirty="0">
+                    <a:solidFill>
+                      <a:srgbClr val="FF6600"/>
+                    </a:solidFill>
+                    <a:latin typeface="Consolas" panose="020B0609020204030204" pitchFamily="49" charset="0"/>
+                  </a:rPr>
+                  <a:t>)= quadratic time</a:t>
+                </a:r>
+              </a:p>
+              <a:p>
+                <a:pPr marL="285750" indent="-285750">
+                  <a:buFont typeface="Arial" panose="020B0604020202020204" pitchFamily="34" charset="0"/>
+                  <a:buChar char="•"/>
+                </a:pPr>
+                <a:r>
+                  <a:rPr lang="en-PH" sz="1500" b="1" dirty="0">
+                    <a:solidFill>
+                      <a:srgbClr val="FF6600"/>
+                    </a:solidFill>
+                    <a:latin typeface="Consolas" panose="020B0609020204030204" pitchFamily="49" charset="0"/>
+                  </a:rPr>
+                  <a:t>Insertion sort</a:t>
+                </a:r>
+              </a:p>
+              <a:p>
+                <a:pPr marL="285750" indent="-285750">
+                  <a:buFont typeface="Arial" panose="020B0604020202020204" pitchFamily="34" charset="0"/>
+                  <a:buChar char="•"/>
+                </a:pPr>
+                <a:r>
+                  <a:rPr lang="en-PH" sz="1500" b="1" dirty="0">
+                    <a:solidFill>
+                      <a:srgbClr val="FF6600"/>
+                    </a:solidFill>
+                    <a:latin typeface="Consolas" panose="020B0609020204030204" pitchFamily="49" charset="0"/>
+                  </a:rPr>
+                  <a:t>Selection sort</a:t>
+                </a:r>
+              </a:p>
+              <a:p>
+                <a:pPr marL="285750" indent="-285750">
+                  <a:buFont typeface="Arial" panose="020B0604020202020204" pitchFamily="34" charset="0"/>
+                  <a:buChar char="•"/>
+                </a:pPr>
+                <a:r>
+                  <a:rPr lang="en-PH" sz="1500" b="1" dirty="0">
+                    <a:solidFill>
+                      <a:srgbClr val="FF6600"/>
+                    </a:solidFill>
+                    <a:latin typeface="Consolas" panose="020B0609020204030204" pitchFamily="49" charset="0"/>
+                  </a:rPr>
+                  <a:t>Bubble sort</a:t>
+                </a:r>
+              </a:p>
+            </p:txBody>
+          </p:sp>
+        </mc:Choice>
+        <mc:Fallback xmlns="">
+          <p:sp>
+            <p:nvSpPr>
+              <p:cNvPr id="36" name="TextBox 35">
+                <a:extLst>
+                  <a:ext uri="{FF2B5EF4-FFF2-40B4-BE49-F238E27FC236}">
+                    <a16:creationId xmlns:a16="http://schemas.microsoft.com/office/drawing/2014/main" id="{DF7BB878-4EFC-B462-EDDB-EAD09A21C43D}"/>
+                  </a:ext>
+                </a:extLst>
+              </p:cNvPr>
+              <p:cNvSpPr txBox="1">
+                <a:spLocks noRot="1" noChangeAspect="1" noMove="1" noResize="1" noEditPoints="1" noAdjustHandles="1" noChangeArrowheads="1" noChangeShapeType="1" noTextEdit="1"/>
+              </p:cNvSpPr>
+              <p:nvPr/>
+            </p:nvSpPr>
+            <p:spPr>
+              <a:xfrm>
+                <a:off x="4077495" y="627358"/>
+                <a:ext cx="2426177" cy="1036630"/>
+              </a:xfrm>
+              <a:prstGeom prst="rect">
+                <a:avLst/>
+              </a:prstGeom>
+              <a:blipFill>
+                <a:blip r:embed="rId4"/>
+                <a:stretch>
+                  <a:fillRect l="-1005" b="-4118"/>
+                </a:stretch>
+              </a:blipFill>
+            </p:spPr>
+            <p:txBody>
+              <a:bodyPr/>
+              <a:lstStyle/>
+              <a:p>
+                <a:r>
+                  <a:rPr lang="en-PH">
+                    <a:noFill/>
+                  </a:rPr>
+                  <a:t> </a:t>
+                </a:r>
+              </a:p>
+            </p:txBody>
+          </p:sp>
+        </mc:Fallback>
+      </mc:AlternateContent>
+    </p:spTree>
+    <p:extLst>
+      <p:ext uri="{BB962C8B-B14F-4D97-AF65-F5344CB8AC3E}">
+        <p14:creationId xmlns:p14="http://schemas.microsoft.com/office/powerpoint/2010/main" val="3483719961"/>
+      </p:ext>
+    </p:extLst>
+  </p:cSld>
+  <p:clrMapOvr>
+    <a:masterClrMapping/>
+  </p:clrMapOvr>
+  <p:timing>
+    <p:tnLst>
+      <p:par>
+        <p:cTn id="1" dur="indefinite" restart="never" nodeType="tmRoot">
+          <p:childTnLst>
+            <p:seq concurrent="1" nextAc="seek">
+              <p:cTn id="2" dur="indefinite" nodeType="mainSeq">
+                <p:childTnLst>
+                  <p:par>
+                    <p:cTn id="3" fill="hold">
+                      <p:stCondLst>
+                        <p:cond delay="indefinite"/>
+                      </p:stCondLst>
+                      <p:childTnLst>
+                        <p:par>
+                          <p:cTn id="4" fill="hold">
+                            <p:stCondLst>
+                              <p:cond delay="0"/>
+                            </p:stCondLst>
+                            <p:childTnLst>
+                              <p:par>
+                                <p:cTn id="5" presetID="22" presetClass="entr" presetSubtype="4" fill="hold" grpId="0" nodeType="clickEffect">
+                                  <p:stCondLst>
+                                    <p:cond delay="0"/>
+                                  </p:stCondLst>
+                                  <p:childTnLst>
+                                    <p:set>
+                                      <p:cBhvr>
+                                        <p:cTn id="6" dur="1" fill="hold">
+                                          <p:stCondLst>
+                                            <p:cond delay="0"/>
+                                          </p:stCondLst>
+                                        </p:cTn>
+                                        <p:tgtEl>
+                                          <p:spTgt spid="34"/>
+                                        </p:tgtEl>
+                                        <p:attrNameLst>
+                                          <p:attrName>style.visibility</p:attrName>
+                                        </p:attrNameLst>
+                                      </p:cBhvr>
+                                      <p:to>
+                                        <p:strVal val="visible"/>
+                                      </p:to>
+                                    </p:set>
+                                    <p:animEffect transition="in" filter="wipe(down)">
+                                      <p:cBhvr>
+                                        <p:cTn id="7" dur="500"/>
+                                        <p:tgtEl>
+                                          <p:spTgt spid="34"/>
+                                        </p:tgtEl>
+                                      </p:cBhvr>
+                                    </p:animEffect>
+                                  </p:childTnLst>
+                                </p:cTn>
+                              </p:par>
+                            </p:childTnLst>
+                          </p:cTn>
+                        </p:par>
+                      </p:childTnLst>
+                    </p:cTn>
+                  </p:par>
+                  <p:par>
+                    <p:cTn id="8" fill="hold">
+                      <p:stCondLst>
+                        <p:cond delay="indefinite"/>
+                      </p:stCondLst>
+                      <p:childTnLst>
+                        <p:par>
+                          <p:cTn id="9" fill="hold">
+                            <p:stCondLst>
+                              <p:cond delay="0"/>
+                            </p:stCondLst>
+                            <p:childTnLst>
+                              <p:par>
+                                <p:cTn id="10" presetID="10" presetClass="entr" presetSubtype="0" fill="hold" grpId="0" nodeType="clickEffect">
+                                  <p:stCondLst>
+                                    <p:cond delay="0"/>
+                                  </p:stCondLst>
+                                  <p:childTnLst>
+                                    <p:set>
+                                      <p:cBhvr>
+                                        <p:cTn id="11" dur="1" fill="hold">
+                                          <p:stCondLst>
+                                            <p:cond delay="0"/>
+                                          </p:stCondLst>
+                                        </p:cTn>
+                                        <p:tgtEl>
+                                          <p:spTgt spid="35"/>
+                                        </p:tgtEl>
+                                        <p:attrNameLst>
+                                          <p:attrName>style.visibility</p:attrName>
+                                        </p:attrNameLst>
+                                      </p:cBhvr>
+                                      <p:to>
+                                        <p:strVal val="visible"/>
+                                      </p:to>
+                                    </p:set>
+                                    <p:animEffect transition="in" filter="fade">
+                                      <p:cBhvr>
+                                        <p:cTn id="12" dur="500"/>
+                                        <p:tgtEl>
+                                          <p:spTgt spid="35"/>
+                                        </p:tgtEl>
+                                      </p:cBhvr>
+                                    </p:animEffect>
+                                  </p:childTnLst>
+                                </p:cTn>
+                              </p:par>
+                              <p:par>
+                                <p:cTn id="13" presetID="10" presetClass="entr" presetSubtype="0" fill="hold" grpId="0" nodeType="withEffect">
+                                  <p:stCondLst>
+                                    <p:cond delay="0"/>
+                                  </p:stCondLst>
+                                  <p:childTnLst>
+                                    <p:set>
+                                      <p:cBhvr>
+                                        <p:cTn id="14" dur="1" fill="hold">
+                                          <p:stCondLst>
+                                            <p:cond delay="0"/>
+                                          </p:stCondLst>
+                                        </p:cTn>
+                                        <p:tgtEl>
+                                          <p:spTgt spid="36"/>
+                                        </p:tgtEl>
+                                        <p:attrNameLst>
+                                          <p:attrName>style.visibility</p:attrName>
+                                        </p:attrNameLst>
+                                      </p:cBhvr>
+                                      <p:to>
+                                        <p:strVal val="visible"/>
+                                      </p:to>
+                                    </p:set>
+                                    <p:animEffect transition="in" filter="fade">
+                                      <p:cBhvr>
+                                        <p:cTn id="15" dur="500"/>
+                                        <p:tgtEl>
+                                          <p:spTgt spid="36"/>
+                                        </p:tgtEl>
+                                      </p:cBhvr>
+                                    </p:animEffect>
+                                  </p:childTnLst>
+                                </p:cTn>
+                              </p:par>
+                            </p:childTnLst>
+                          </p:cTn>
+                        </p:par>
+                      </p:childTnLst>
+                    </p:cTn>
+                  </p:par>
+                </p:childTnLst>
+              </p:cTn>
+              <p:prevCondLst>
+                <p:cond evt="onPrev" delay="0">
+                  <p:tgtEl>
+                    <p:sldTgt/>
+                  </p:tgtEl>
+                </p:cond>
+              </p:prevCondLst>
+              <p:nextCondLst>
+                <p:cond evt="onNext" delay="0">
+                  <p:tgtEl>
+                    <p:sldTgt/>
+                  </p:tgtEl>
+                </p:cond>
+              </p:nextCondLst>
+            </p:seq>
+          </p:childTnLst>
+        </p:cTn>
+      </p:par>
+    </p:tnLst>
+    <p:bldLst>
+      <p:bldP spid="34" grpId="0" animBg="1"/>
+      <p:bldP spid="35" grpId="0"/>
+      <p:bldP spid="36" grpId="0"/>
+    </p:bldLst>
+  </p:timing>
+</p:sld>
+</file>
+
 <file path=ppt/slides/slide2.xml><?xml version="1.0" encoding="utf-8"?>
 <p:sld xmlns:a="http://schemas.openxmlformats.org/drawingml/2006/main" xmlns:r="http://schemas.openxmlformats.org/officeDocument/2006/relationships" xmlns:p="http://schemas.openxmlformats.org/presentationml/2006/main">
   <p:cSld>
     <p:bg>
       <p:bgPr>
         <a:solidFill>
-          <a:schemeClr val="bg1"/>
+          <a:schemeClr val="tx1"/>
         </a:solidFill>
         <a:effectLst/>
       </p:bgPr>
@@ -9015,10 +10336,18 @@
           <a:lstStyle/>
           <a:p>
             <a:r>
-              <a:rPr lang="en-US" b="1" dirty="0"/>
+              <a:rPr lang="en-US" b="1" dirty="0">
+                <a:solidFill>
+                  <a:srgbClr val="00B050"/>
+                </a:solidFill>
+              </a:rPr>
               <a:t>Bubble Sort</a:t>
             </a:r>
-            <a:endParaRPr lang="en-PH" b="1" dirty="0"/>
+            <a:endParaRPr lang="en-PH" b="1" dirty="0">
+              <a:solidFill>
+                <a:srgbClr val="00B050"/>
+              </a:solidFill>
+            </a:endParaRPr>
           </a:p>
         </p:txBody>
       </p:sp>
@@ -9144,56 +10473,83 @@
             <a:pPr algn="l"/>
             <a:r>
               <a:rPr lang="en-US" sz="3000" dirty="0">
+                <a:solidFill>
+                  <a:schemeClr val="bg1"/>
+                </a:solidFill>
                 <a:latin typeface="Calibri Body"/>
               </a:rPr>
-              <a:t>Bubble sort is compares two adjacent elements and swaps them until they are in the intended order.</a:t>
+              <a:t>Bubble sort compares two adjacent elements and swaps them until they are in the intended order.</a:t>
             </a:r>
           </a:p>
           <a:p>
             <a:pPr algn="l"/>
             <a:endParaRPr lang="en-US" sz="3000" dirty="0">
+              <a:solidFill>
+                <a:schemeClr val="bg1"/>
+              </a:solidFill>
               <a:latin typeface="Calibri Body"/>
             </a:endParaRPr>
           </a:p>
           <a:p>
             <a:pPr algn="l"/>
             <a:endParaRPr lang="en-US" sz="3000" dirty="0">
+              <a:solidFill>
+                <a:schemeClr val="bg1"/>
+              </a:solidFill>
               <a:latin typeface="Calibri Body"/>
             </a:endParaRPr>
           </a:p>
           <a:p>
             <a:pPr algn="l"/>
             <a:endParaRPr lang="en-US" sz="3000" dirty="0">
+              <a:solidFill>
+                <a:schemeClr val="bg1"/>
+              </a:solidFill>
               <a:latin typeface="Calibri Body"/>
             </a:endParaRPr>
           </a:p>
           <a:p>
             <a:pPr algn="l"/>
             <a:endParaRPr lang="en-US" sz="3000" dirty="0">
+              <a:solidFill>
+                <a:schemeClr val="bg1"/>
+              </a:solidFill>
               <a:latin typeface="Calibri Body"/>
             </a:endParaRPr>
           </a:p>
           <a:p>
             <a:pPr algn="l"/>
             <a:endParaRPr lang="en-US" sz="3000" dirty="0">
+              <a:solidFill>
+                <a:schemeClr val="bg1"/>
+              </a:solidFill>
               <a:latin typeface="Calibri Body"/>
             </a:endParaRPr>
           </a:p>
           <a:p>
             <a:pPr algn="l"/>
             <a:endParaRPr lang="en-US" sz="3000" dirty="0">
+              <a:solidFill>
+                <a:schemeClr val="bg1"/>
+              </a:solidFill>
               <a:latin typeface="Calibri Body"/>
             </a:endParaRPr>
           </a:p>
           <a:p>
             <a:pPr algn="l"/>
             <a:endParaRPr lang="en-US" sz="3000" dirty="0">
+              <a:solidFill>
+                <a:schemeClr val="bg1"/>
+              </a:solidFill>
               <a:latin typeface="Calibri Body"/>
             </a:endParaRPr>
           </a:p>
           <a:p>
             <a:pPr algn="l"/>
             <a:endParaRPr lang="en-US" sz="3000" dirty="0">
+              <a:solidFill>
+                <a:schemeClr val="bg1"/>
+              </a:solidFill>
               <a:latin typeface="Calibri Body"/>
             </a:endParaRPr>
           </a:p>
@@ -9254,7 +10610,7 @@
     <p:bg>
       <p:bgPr>
         <a:solidFill>
-          <a:schemeClr val="bg1"/>
+          <a:schemeClr val="tx1"/>
         </a:solidFill>
         <a:effectLst/>
       </p:bgPr>
@@ -9302,10 +10658,18 @@
           <a:lstStyle/>
           <a:p>
             <a:r>
-              <a:rPr lang="en-US" b="1" dirty="0"/>
+              <a:rPr lang="en-US" b="1" dirty="0">
+                <a:solidFill>
+                  <a:srgbClr val="00B050"/>
+                </a:solidFill>
+              </a:rPr>
               <a:t>Bubble Sort</a:t>
             </a:r>
-            <a:endParaRPr lang="en-PH" b="1" dirty="0"/>
+            <a:endParaRPr lang="en-PH" b="1" dirty="0">
+              <a:solidFill>
+                <a:srgbClr val="00B050"/>
+              </a:solidFill>
+            </a:endParaRPr>
           </a:p>
         </p:txBody>
       </p:sp>
@@ -9812,7 +11176,7 @@
     <p:bg>
       <p:bgPr>
         <a:solidFill>
-          <a:schemeClr val="bg1"/>
+          <a:schemeClr val="tx1"/>
         </a:solidFill>
         <a:effectLst/>
       </p:bgPr>
@@ -9860,10 +11224,18 @@
           <a:lstStyle/>
           <a:p>
             <a:r>
-              <a:rPr lang="en-US" b="1" dirty="0"/>
+              <a:rPr lang="en-US" b="1" dirty="0">
+                <a:solidFill>
+                  <a:srgbClr val="00B050"/>
+                </a:solidFill>
+              </a:rPr>
               <a:t>Bubble Sort</a:t>
             </a:r>
-            <a:endParaRPr lang="en-PH" b="1" dirty="0"/>
+            <a:endParaRPr lang="en-PH" b="1" dirty="0">
+              <a:solidFill>
+                <a:srgbClr val="00B050"/>
+              </a:solidFill>
+            </a:endParaRPr>
           </a:p>
         </p:txBody>
       </p:sp>
@@ -10308,7 +11680,7 @@
     <p:bg>
       <p:bgPr>
         <a:solidFill>
-          <a:schemeClr val="bg1"/>
+          <a:schemeClr val="tx1"/>
         </a:solidFill>
         <a:effectLst/>
       </p:bgPr>
@@ -10356,10 +11728,18 @@
           <a:lstStyle/>
           <a:p>
             <a:r>
-              <a:rPr lang="en-US" b="1" dirty="0"/>
+              <a:rPr lang="en-US" b="1" dirty="0">
+                <a:solidFill>
+                  <a:srgbClr val="00B050"/>
+                </a:solidFill>
+              </a:rPr>
               <a:t>Bubble Sort</a:t>
             </a:r>
-            <a:endParaRPr lang="en-PH" b="1" dirty="0"/>
+            <a:endParaRPr lang="en-PH" b="1" dirty="0">
+              <a:solidFill>
+                <a:srgbClr val="00B050"/>
+              </a:solidFill>
+            </a:endParaRPr>
           </a:p>
         </p:txBody>
       </p:sp>
@@ -10804,7 +12184,7 @@
     <p:bg>
       <p:bgPr>
         <a:solidFill>
-          <a:schemeClr val="bg1"/>
+          <a:schemeClr val="tx1"/>
         </a:solidFill>
         <a:effectLst/>
       </p:bgPr>
@@ -10852,10 +12232,18 @@
           <a:lstStyle/>
           <a:p>
             <a:r>
-              <a:rPr lang="en-US" b="1" dirty="0"/>
+              <a:rPr lang="en-US" b="1" dirty="0">
+                <a:solidFill>
+                  <a:srgbClr val="00B050"/>
+                </a:solidFill>
+              </a:rPr>
               <a:t>Bubble Sort</a:t>
             </a:r>
-            <a:endParaRPr lang="en-PH" b="1" dirty="0"/>
+            <a:endParaRPr lang="en-PH" b="1" dirty="0">
+              <a:solidFill>
+                <a:srgbClr val="00B050"/>
+              </a:solidFill>
+            </a:endParaRPr>
           </a:p>
         </p:txBody>
       </p:sp>
@@ -11364,7 +12752,7 @@
     <p:bg>
       <p:bgPr>
         <a:solidFill>
-          <a:schemeClr val="bg1"/>
+          <a:schemeClr val="tx1"/>
         </a:solidFill>
         <a:effectLst/>
       </p:bgPr>
@@ -11401,7 +12789,7 @@
         </p:nvSpPr>
         <p:spPr>
           <a:xfrm>
-            <a:off x="732773" y="497150"/>
+            <a:off x="773594" y="505314"/>
             <a:ext cx="9935227" cy="718459"/>
           </a:xfrm>
         </p:spPr>
@@ -11412,10 +12800,18 @@
           <a:lstStyle/>
           <a:p>
             <a:r>
-              <a:rPr lang="en-US" b="1" dirty="0"/>
+              <a:rPr lang="en-US" b="1" dirty="0">
+                <a:solidFill>
+                  <a:srgbClr val="00B050"/>
+                </a:solidFill>
+              </a:rPr>
               <a:t>Bubble Sort</a:t>
             </a:r>
-            <a:endParaRPr lang="en-PH" b="1" dirty="0"/>
+            <a:endParaRPr lang="en-PH" b="1" dirty="0">
+              <a:solidFill>
+                <a:srgbClr val="00B050"/>
+              </a:solidFill>
+            </a:endParaRPr>
           </a:p>
         </p:txBody>
       </p:sp>
@@ -11678,7 +13074,7 @@
     <p:bg>
       <p:bgPr>
         <a:solidFill>
-          <a:schemeClr val="bg1"/>
+          <a:schemeClr val="tx1"/>
         </a:solidFill>
         <a:effectLst/>
       </p:bgPr>
@@ -11726,10 +13122,18 @@
           <a:lstStyle/>
           <a:p>
             <a:r>
-              <a:rPr lang="en-US" b="1" dirty="0"/>
+              <a:rPr lang="en-US" b="1" dirty="0">
+                <a:solidFill>
+                  <a:srgbClr val="00B050"/>
+                </a:solidFill>
+              </a:rPr>
               <a:t>Bubble Sort</a:t>
             </a:r>
-            <a:endParaRPr lang="en-PH" b="1" dirty="0"/>
+            <a:endParaRPr lang="en-PH" b="1" dirty="0">
+              <a:solidFill>
+                <a:srgbClr val="00B050"/>
+              </a:solidFill>
+            </a:endParaRPr>
           </a:p>
         </p:txBody>
       </p:sp>
@@ -12174,7 +13578,7 @@
     <p:bg>
       <p:bgPr>
         <a:solidFill>
-          <a:schemeClr val="bg1"/>
+          <a:schemeClr val="tx1"/>
         </a:solidFill>
         <a:effectLst/>
       </p:bgPr>
@@ -12222,10 +13626,18 @@
           <a:lstStyle/>
           <a:p>
             <a:r>
-              <a:rPr lang="en-US" b="1" dirty="0"/>
+              <a:rPr lang="en-US" b="1" dirty="0">
+                <a:solidFill>
+                  <a:srgbClr val="00B050"/>
+                </a:solidFill>
+              </a:rPr>
               <a:t>Bubble Sort</a:t>
             </a:r>
-            <a:endParaRPr lang="en-PH" b="1" dirty="0"/>
+            <a:endParaRPr lang="en-PH" b="1" dirty="0">
+              <a:solidFill>
+                <a:srgbClr val="00B050"/>
+              </a:solidFill>
+            </a:endParaRPr>
           </a:p>
         </p:txBody>
       </p:sp>
@@ -13255,21 +14667,6 @@
 </file>
 
 <file path=customXml/item1.xml><?xml version="1.0" encoding="utf-8"?>
-<?mso-contentType ?>
-<FormTemplates xmlns="http://schemas.microsoft.com/sharepoint/v3/contenttype/forms">
-  <Display>DocumentLibraryForm</Display>
-  <Edit>DocumentLibraryForm</Edit>
-  <New>DocumentLibraryForm</New>
-</FormTemplates>
-</file>
-
-<file path=customXml/item2.xml><?xml version="1.0" encoding="utf-8"?>
-<p:properties xmlns:p="http://schemas.microsoft.com/office/2006/metadata/properties" xmlns:xsi="http://www.w3.org/2001/XMLSchema-instance" xmlns:pc="http://schemas.microsoft.com/office/infopath/2007/PartnerControls">
-  <documentManagement/>
-</p:properties>
-</file>
-
-<file path=customXml/item3.xml><?xml version="1.0" encoding="utf-8"?>
 <ct:contentTypeSchema xmlns:ct="http://schemas.microsoft.com/office/2006/metadata/contentType" xmlns:ma="http://schemas.microsoft.com/office/2006/metadata/properties/metaAttributes" ct:_="" ma:_="" ma:contentTypeName="Document" ma:contentTypeID="0x0101007188BDCA587B344BBA6CB1A93FAE6998" ma:contentTypeVersion="2" ma:contentTypeDescription="Create a new document." ma:contentTypeScope="" ma:versionID="7a8e4b6720badb2566a0cfeddfaf2856">
   <xsd:schema xmlns:xsd="http://www.w3.org/2001/XMLSchema" xmlns:xs="http://www.w3.org/2001/XMLSchema" xmlns:p="http://schemas.microsoft.com/office/2006/metadata/properties" xmlns:ns2="ba111d12-426d-4af0-bcb6-460e36974645" targetNamespace="http://schemas.microsoft.com/office/2006/metadata/properties" ma:root="true" ma:fieldsID="989b05398519136c88ba0a8d54e3c3da" ns2:_="">
     <xsd:import namespace="ba111d12-426d-4af0-bcb6-460e36974645"/>
@@ -13401,24 +14798,22 @@
 </ct:contentTypeSchema>
 </file>
 
-<file path=customXml/itemProps1.xml><?xml version="1.0" encoding="utf-8"?>
-<ds:datastoreItem xmlns:ds="http://schemas.openxmlformats.org/officeDocument/2006/customXml" ds:itemID="{651370AF-26B9-4AFA-BA9D-5D4A7E1A6722}">
-  <ds:schemaRefs>
-    <ds:schemaRef ds:uri="http://schemas.microsoft.com/sharepoint/v3/contenttype/forms"/>
-  </ds:schemaRefs>
-</ds:datastoreItem>
+<file path=customXml/item2.xml><?xml version="1.0" encoding="utf-8"?>
+<?mso-contentType ?>
+<FormTemplates xmlns="http://schemas.microsoft.com/sharepoint/v3/contenttype/forms">
+  <Display>DocumentLibraryForm</Display>
+  <Edit>DocumentLibraryForm</Edit>
+  <New>DocumentLibraryForm</New>
+</FormTemplates>
 </file>
 
-<file path=customXml/itemProps2.xml><?xml version="1.0" encoding="utf-8"?>
-<ds:datastoreItem xmlns:ds="http://schemas.openxmlformats.org/officeDocument/2006/customXml" ds:itemID="{EA3362E2-FA54-4262-AE94-2FA98FF8142D}">
-  <ds:schemaRefs>
-    <ds:schemaRef ds:uri="http://schemas.microsoft.com/office/2006/metadata/properties"/>
-    <ds:schemaRef ds:uri="http://schemas.microsoft.com/office/infopath/2007/PartnerControls"/>
-  </ds:schemaRefs>
-</ds:datastoreItem>
+<file path=customXml/item3.xml><?xml version="1.0" encoding="utf-8"?>
+<p:properties xmlns:p="http://schemas.microsoft.com/office/2006/metadata/properties" xmlns:xsi="http://www.w3.org/2001/XMLSchema-instance" xmlns:pc="http://schemas.microsoft.com/office/infopath/2007/PartnerControls">
+  <documentManagement/>
+</p:properties>
 </file>
 
-<file path=customXml/itemProps3.xml><?xml version="1.0" encoding="utf-8"?>
+<file path=customXml/itemProps1.xml><?xml version="1.0" encoding="utf-8"?>
 <ds:datastoreItem xmlns:ds="http://schemas.openxmlformats.org/officeDocument/2006/customXml" ds:itemID="{3D61E20B-708A-4719-8C02-DA91A478A7AB}">
   <ds:schemaRefs>
     <ds:schemaRef ds:uri="http://schemas.microsoft.com/office/2006/metadata/contentType"/>
@@ -13434,4 +14829,21 @@
     <ds:schemaRef ds:uri="http://schemas.microsoft.com/internal/obd"/>
   </ds:schemaRefs>
 </ds:datastoreItem>
+</file>
+
+<file path=customXml/itemProps2.xml><?xml version="1.0" encoding="utf-8"?>
+<ds:datastoreItem xmlns:ds="http://schemas.openxmlformats.org/officeDocument/2006/customXml" ds:itemID="{651370AF-26B9-4AFA-BA9D-5D4A7E1A6722}">
+  <ds:schemaRefs>
+    <ds:schemaRef ds:uri="http://schemas.microsoft.com/sharepoint/v3/contenttype/forms"/>
+  </ds:schemaRefs>
+</ds:datastoreItem>
+</file>
+
+<file path=customXml/itemProps3.xml><?xml version="1.0" encoding="utf-8"?>
+<ds:datastoreItem xmlns:ds="http://schemas.openxmlformats.org/officeDocument/2006/customXml" ds:itemID="{EA3362E2-FA54-4262-AE94-2FA98FF8142D}">
+  <ds:schemaRefs>
+    <ds:schemaRef ds:uri="http://schemas.microsoft.com/office/2006/metadata/properties"/>
+    <ds:schemaRef ds:uri="http://schemas.microsoft.com/office/infopath/2007/PartnerControls"/>
+  </ds:schemaRefs>
+</ds:datastoreItem>
 </file>
--- a/sorting_algorithms/Bubble Sort.pptx
+++ b/sorting_algorithms/Bubble Sort.pptx
@@ -222,7 +222,7 @@
           <a:p>
             <a:fld id="{F666E1FD-E7A0-497B-BBC0-740BAAC97C64}" type="datetimeFigureOut">
               <a:rPr lang="en-PH" smtClean="0"/>
-              <a:t>14/07/2026</a:t>
+              <a:t>7/14/26</a:t>
             </a:fld>
             <a:endParaRPr lang="en-PH"/>
           </a:p>
@@ -2183,7 +2183,7 @@
           <a:p>
             <a:fld id="{0CCF0B81-6BD8-4C65-9459-815598C5F1F4}" type="datetimeFigureOut">
               <a:rPr lang="en-PH" smtClean="0"/>
-              <a:t>14/07/2026</a:t>
+              <a:t>7/14/26</a:t>
             </a:fld>
             <a:endParaRPr lang="en-PH"/>
           </a:p>
@@ -2391,7 +2391,7 @@
           <a:p>
             <a:fld id="{0CCF0B81-6BD8-4C65-9459-815598C5F1F4}" type="datetimeFigureOut">
               <a:rPr lang="en-PH" smtClean="0"/>
-              <a:t>14/07/2026</a:t>
+              <a:t>7/14/26</a:t>
             </a:fld>
             <a:endParaRPr lang="en-PH"/>
           </a:p>
@@ -2609,7 +2609,7 @@
           <a:p>
             <a:fld id="{0CCF0B81-6BD8-4C65-9459-815598C5F1F4}" type="datetimeFigureOut">
               <a:rPr lang="en-PH" smtClean="0"/>
-              <a:t>14/07/2026</a:t>
+              <a:t>7/14/26</a:t>
             </a:fld>
             <a:endParaRPr lang="en-PH"/>
           </a:p>
@@ -2817,7 +2817,7 @@
           <a:p>
             <a:fld id="{0CCF0B81-6BD8-4C65-9459-815598C5F1F4}" type="datetimeFigureOut">
               <a:rPr lang="en-PH" smtClean="0"/>
-              <a:t>14/07/2026</a:t>
+              <a:t>7/14/26</a:t>
             </a:fld>
             <a:endParaRPr lang="en-PH"/>
           </a:p>
@@ -3101,7 +3101,7 @@
           <a:p>
             <a:fld id="{0CCF0B81-6BD8-4C65-9459-815598C5F1F4}" type="datetimeFigureOut">
               <a:rPr lang="en-PH" smtClean="0"/>
-              <a:t>14/07/2026</a:t>
+              <a:t>7/14/26</a:t>
             </a:fld>
             <a:endParaRPr lang="en-PH"/>
           </a:p>
@@ -3377,7 +3377,7 @@
           <a:p>
             <a:fld id="{0CCF0B81-6BD8-4C65-9459-815598C5F1F4}" type="datetimeFigureOut">
               <a:rPr lang="en-PH" smtClean="0"/>
-              <a:t>14/07/2026</a:t>
+              <a:t>7/14/26</a:t>
             </a:fld>
             <a:endParaRPr lang="en-PH"/>
           </a:p>
@@ -3800,7 +3800,7 @@
           <a:p>
             <a:fld id="{0CCF0B81-6BD8-4C65-9459-815598C5F1F4}" type="datetimeFigureOut">
               <a:rPr lang="en-PH" smtClean="0"/>
-              <a:t>14/07/2026</a:t>
+              <a:t>7/14/26</a:t>
             </a:fld>
             <a:endParaRPr lang="en-PH"/>
           </a:p>
@@ -3950,7 +3950,7 @@
           <a:p>
             <a:fld id="{0CCF0B81-6BD8-4C65-9459-815598C5F1F4}" type="datetimeFigureOut">
               <a:rPr lang="en-PH" smtClean="0"/>
-              <a:t>14/07/2026</a:t>
+              <a:t>7/14/26</a:t>
             </a:fld>
             <a:endParaRPr lang="en-PH"/>
           </a:p>
@@ -4071,7 +4071,7 @@
           <a:p>
             <a:fld id="{0CCF0B81-6BD8-4C65-9459-815598C5F1F4}" type="datetimeFigureOut">
               <a:rPr lang="en-PH" smtClean="0"/>
-              <a:t>14/07/2026</a:t>
+              <a:t>7/14/26</a:t>
             </a:fld>
             <a:endParaRPr lang="en-PH"/>
           </a:p>
@@ -4392,7 +4392,7 @@
           <a:p>
             <a:fld id="{0CCF0B81-6BD8-4C65-9459-815598C5F1F4}" type="datetimeFigureOut">
               <a:rPr lang="en-PH" smtClean="0"/>
-              <a:t>14/07/2026</a:t>
+              <a:t>7/14/26</a:t>
             </a:fld>
             <a:endParaRPr lang="en-PH"/>
           </a:p>
@@ -4689,7 +4689,7 @@
           <a:p>
             <a:fld id="{0CCF0B81-6BD8-4C65-9459-815598C5F1F4}" type="datetimeFigureOut">
               <a:rPr lang="en-PH" smtClean="0"/>
-              <a:t>14/07/2026</a:t>
+              <a:t>7/14/26</a:t>
             </a:fld>
             <a:endParaRPr lang="en-PH"/>
           </a:p>
@@ -4935,7 +4935,7 @@
           <a:p>
             <a:fld id="{0CCF0B81-6BD8-4C65-9459-815598C5F1F4}" type="datetimeFigureOut">
               <a:rPr lang="en-PH" smtClean="0"/>
-              <a:t>14/07/2026</a:t>
+              <a:t>7/14/26</a:t>
             </a:fld>
             <a:endParaRPr lang="en-PH"/>
           </a:p>
@@ -5608,6 +5608,42 @@
           </a:p>
         </p:txBody>
       </p:sp>
+      <p:pic>
+        <p:nvPicPr>
+          <p:cNvPr id="4" name="Picture 3">
+            <a:extLst>
+              <a:ext uri="{FF2B5EF4-FFF2-40B4-BE49-F238E27FC236}">
+                <a16:creationId xmlns:a16="http://schemas.microsoft.com/office/drawing/2014/main" id="{E6AE41F3-F9AF-9EB5-6AFB-E4E27EAAB231}"/>
+              </a:ext>
+            </a:extLst>
+          </p:cNvPr>
+          <p:cNvPicPr>
+            <a:picLocks noChangeAspect="1"/>
+          </p:cNvPicPr>
+          <p:nvPr/>
+        </p:nvPicPr>
+        <p:blipFill>
+          <a:blip r:embed="rId3">
+            <a:extLst>
+              <a:ext uri="{28A0092B-C50C-407E-A947-70E740481C1C}">
+                <a14:useLocalDpi xmlns:a14="http://schemas.microsoft.com/office/drawing/2010/main" val="0"/>
+              </a:ext>
+            </a:extLst>
+          </a:blip>
+          <a:stretch>
+            <a:fillRect/>
+          </a:stretch>
+        </p:blipFill>
+        <p:spPr>
+          <a:xfrm>
+            <a:off x="3563193" y="3541551"/>
+            <a:ext cx="5142857" cy="1800000"/>
+          </a:xfrm>
+          <a:prstGeom prst="rect">
+            <a:avLst/>
+          </a:prstGeom>
+        </p:spPr>
+      </p:pic>
     </p:spTree>
     <p:extLst>
       <p:ext uri="{BB962C8B-B14F-4D97-AF65-F5344CB8AC3E}">
@@ -14667,6 +14703,15 @@
 </file>
 
 <file path=customXml/item1.xml><?xml version="1.0" encoding="utf-8"?>
+<?mso-contentType ?>
+<FormTemplates xmlns="http://schemas.microsoft.com/sharepoint/v3/contenttype/forms">
+  <Display>DocumentLibraryForm</Display>
+  <Edit>DocumentLibraryForm</Edit>
+  <New>DocumentLibraryForm</New>
+</FormTemplates>
+</file>
+
+<file path=customXml/item2.xml><?xml version="1.0" encoding="utf-8"?>
 <ct:contentTypeSchema xmlns:ct="http://schemas.microsoft.com/office/2006/metadata/contentType" xmlns:ma="http://schemas.microsoft.com/office/2006/metadata/properties/metaAttributes" ct:_="" ma:_="" ma:contentTypeName="Document" ma:contentTypeID="0x0101007188BDCA587B344BBA6CB1A93FAE6998" ma:contentTypeVersion="2" ma:contentTypeDescription="Create a new document." ma:contentTypeScope="" ma:versionID="7a8e4b6720badb2566a0cfeddfaf2856">
   <xsd:schema xmlns:xsd="http://www.w3.org/2001/XMLSchema" xmlns:xs="http://www.w3.org/2001/XMLSchema" xmlns:p="http://schemas.microsoft.com/office/2006/metadata/properties" xmlns:ns2="ba111d12-426d-4af0-bcb6-460e36974645" targetNamespace="http://schemas.microsoft.com/office/2006/metadata/properties" ma:root="true" ma:fieldsID="989b05398519136c88ba0a8d54e3c3da" ns2:_="">
     <xsd:import namespace="ba111d12-426d-4af0-bcb6-460e36974645"/>
@@ -14798,15 +14843,6 @@
 </ct:contentTypeSchema>
 </file>
 
-<file path=customXml/item2.xml><?xml version="1.0" encoding="utf-8"?>
-<?mso-contentType ?>
-<FormTemplates xmlns="http://schemas.microsoft.com/sharepoint/v3/contenttype/forms">
-  <Display>DocumentLibraryForm</Display>
-  <Edit>DocumentLibraryForm</Edit>
-  <New>DocumentLibraryForm</New>
-</FormTemplates>
-</file>
-
 <file path=customXml/item3.xml><?xml version="1.0" encoding="utf-8"?>
 <p:properties xmlns:p="http://schemas.microsoft.com/office/2006/metadata/properties" xmlns:xsi="http://www.w3.org/2001/XMLSchema-instance" xmlns:pc="http://schemas.microsoft.com/office/infopath/2007/PartnerControls">
   <documentManagement/>
@@ -14814,6 +14850,14 @@
 </file>
 
 <file path=customXml/itemProps1.xml><?xml version="1.0" encoding="utf-8"?>
+<ds:datastoreItem xmlns:ds="http://schemas.openxmlformats.org/officeDocument/2006/customXml" ds:itemID="{651370AF-26B9-4AFA-BA9D-5D4A7E1A6722}">
+  <ds:schemaRefs>
+    <ds:schemaRef ds:uri="http://schemas.microsoft.com/sharepoint/v3/contenttype/forms"/>
+  </ds:schemaRefs>
+</ds:datastoreItem>
+</file>
+
+<file path=customXml/itemProps2.xml><?xml version="1.0" encoding="utf-8"?>
 <ds:datastoreItem xmlns:ds="http://schemas.openxmlformats.org/officeDocument/2006/customXml" ds:itemID="{3D61E20B-708A-4719-8C02-DA91A478A7AB}">
   <ds:schemaRefs>
     <ds:schemaRef ds:uri="http://schemas.microsoft.com/office/2006/metadata/contentType"/>
@@ -14831,14 +14875,6 @@
 </ds:datastoreItem>
 </file>
 
-<file path=customXml/itemProps2.xml><?xml version="1.0" encoding="utf-8"?>
-<ds:datastoreItem xmlns:ds="http://schemas.openxmlformats.org/officeDocument/2006/customXml" ds:itemID="{651370AF-26B9-4AFA-BA9D-5D4A7E1A6722}">
-  <ds:schemaRefs>
-    <ds:schemaRef ds:uri="http://schemas.microsoft.com/sharepoint/v3/contenttype/forms"/>
-  </ds:schemaRefs>
-</ds:datastoreItem>
-</file>
-
 <file path=customXml/itemProps3.xml><?xml version="1.0" encoding="utf-8"?>
 <ds:datastoreItem xmlns:ds="http://schemas.openxmlformats.org/officeDocument/2006/customXml" ds:itemID="{EA3362E2-FA54-4262-AE94-2FA98FF8142D}">
   <ds:schemaRefs>
